--- a/slides/soil-information-systems-for-decision-making-in-africa.pptx
+++ b/slides/soil-information-systems-for-decision-making-in-africa.pptx
@@ -3548,7 +3548,30 @@
             </a:pPr>
             <a:r>
               <a:rPr/>
-              <a:t>Role of common vocabularies</a:t>
+              <a:t>identification is an aspect of findability</a:t>
+            </a:r>
+          </a:p>
+        </p:txBody>
+      </p:sp>
+      <p:sp>
+        <p:nvSpPr>
+          <p:cNvPr id="3" name="Content Placeholder 2"/>
+          <p:cNvSpPr>
+            <a:spLocks noGrp="1"/>
+          </p:cNvSpPr>
+          <p:nvPr>
+            <p:ph idx="1"/>
+          </p:nvPr>
+        </p:nvSpPr>
+        <p:spPr/>
+        <p:txBody>
+          <a:bodyPr/>
+          <a:lstStyle/>
+          <a:p>
+            <a:pPr lvl="0"/>
+            <a:r>
+              <a:rPr/>
+              <a:t>what is a dataset?</a:t>
             </a:r>
           </a:p>
         </p:txBody>
@@ -3559,6 +3582,53 @@
 </file>
 
 <file path=ppt/slides/slide17.xml><?xml version="1.0" encoding="utf-8"?>
+<p:sld xmlns:a="http://schemas.openxmlformats.org/drawingml/2006/main" xmlns:r="http://schemas.openxmlformats.org/officeDocument/2006/relationships" xmlns:p="http://schemas.openxmlformats.org/presentationml/2006/main">
+  <p:cSld>
+    <p:spTree>
+      <p:nvGrpSpPr>
+        <p:cNvPr id="1" name=""/>
+        <p:cNvGrpSpPr/>
+        <p:nvPr/>
+      </p:nvGrpSpPr>
+      <p:grpSpPr>
+        <a:xfrm>
+          <a:off x="0" y="0"/>
+          <a:ext cx="0" cy="0"/>
+          <a:chOff x="0" y="0"/>
+          <a:chExt cx="0" cy="0"/>
+        </a:xfrm>
+      </p:grpSpPr>
+      <p:sp>
+        <p:nvSpPr>
+          <p:cNvPr id="2" name="Title 1"/>
+          <p:cNvSpPr>
+            <a:spLocks noGrp="1"/>
+          </p:cNvSpPr>
+          <p:nvPr>
+            <p:ph type="title"/>
+          </p:nvPr>
+        </p:nvSpPr>
+        <p:spPr/>
+        <p:txBody>
+          <a:bodyPr/>
+          <a:lstStyle/>
+          <a:p>
+            <a:pPr lvl="0" indent="0" marL="0">
+              <a:buNone/>
+            </a:pPr>
+            <a:r>
+              <a:rPr/>
+              <a:t>Role of common vocabularies</a:t>
+            </a:r>
+          </a:p>
+        </p:txBody>
+      </p:sp>
+    </p:spTree>
+  </p:cSld>
+</p:sld>
+</file>
+
+<file path=ppt/slides/slide18.xml><?xml version="1.0" encoding="utf-8"?>
 <p:sld xmlns:a="http://schemas.openxmlformats.org/drawingml/2006/main" xmlns:r="http://schemas.openxmlformats.org/officeDocument/2006/relationships" xmlns:p="http://schemas.openxmlformats.org/presentationml/2006/main">
   <p:cSld>
     <p:spTree>
@@ -3690,120 +3760,138 @@
                   </a:txBody>
                 </a:tc>
               </a:tr>
+              <a:tr h="0">
+                <a:tc>
+                  <a:txBody>
+                    <a:bodyPr/>
+                    <a:lstStyle/>
+                    <a:p>
+                      <a:pPr lvl="0" indent="0" marL="0">
+                        <a:buNone/>
+                      </a:pPr>
+                      <a:r>
+                        <a:rPr/>
+                        <a:t>Researchers</a:t>
+                      </a:r>
+                    </a:p>
+                  </a:txBody>
+                </a:tc>
+                <a:tc>
+                  <a:txBody>
+                    <a:bodyPr/>
+                    <a:lstStyle/>
+                    <a:p>
+                      <a:pPr lvl="0" indent="0" marL="0">
+                        <a:buNone/>
+                      </a:pPr>
+                      <a:r>
+                        <a:rPr/>
+                        <a:t>Detailed but anonymized observations under a data-sharing agreement</a:t>
+                      </a:r>
+                    </a:p>
+                  </a:txBody>
+                </a:tc>
+              </a:tr>
+              <a:tr h="0">
+                <a:tc>
+                  <a:txBody>
+                    <a:bodyPr/>
+                    <a:lstStyle/>
+                    <a:p>
+                      <a:pPr lvl="0" indent="0" marL="0">
+                        <a:buNone/>
+                      </a:pPr>
+                      <a:r>
+                        <a:rPr/>
+                        <a:t>Government agencies</a:t>
+                      </a:r>
+                    </a:p>
+                  </a:txBody>
+                </a:tc>
+                <a:tc>
+                  <a:txBody>
+                    <a:bodyPr/>
+                    <a:lstStyle/>
+                    <a:p>
+                      <a:pPr lvl="0" indent="0" marL="0">
+                        <a:buNone/>
+                      </a:pPr>
+                      <a:r>
+                        <a:rPr/>
+                        <a:t>Full datasets needed for regulatory or policy purposes</a:t>
+                      </a:r>
+                    </a:p>
+                  </a:txBody>
+                </a:tc>
+              </a:tr>
+              <a:tr h="0">
+                <a:tc>
+                  <a:txBody>
+                    <a:bodyPr/>
+                    <a:lstStyle/>
+                    <a:p>
+                      <a:pPr lvl="0" indent="0" marL="0">
+                        <a:buNone/>
+                      </a:pPr>
+                      <a:r>
+                        <a:rPr/>
+                        <a:t>Data stewards</a:t>
+                      </a:r>
+                    </a:p>
+                  </a:txBody>
+                </a:tc>
+                <a:tc>
+                  <a:txBody>
+                    <a:bodyPr/>
+                    <a:lstStyle/>
+                    <a:p>
+                      <a:pPr lvl="0" indent="0" marL="0">
+                        <a:buNone/>
+                      </a:pPr>
+                      <a:r>
+                        <a:rPr/>
+                        <a:t>Ability to edit, correct, and approve records</a:t>
+                      </a:r>
+                    </a:p>
+                  </a:txBody>
+                </a:tc>
+              </a:tr>
+              <a:tr h="0">
+                <a:tc>
+                  <a:txBody>
+                    <a:bodyPr/>
+                    <a:lstStyle/>
+                    <a:p>
+                      <a:pPr lvl="0" indent="0" marL="0">
+                        <a:buNone/>
+                      </a:pPr>
+                      <a:r>
+                        <a:rPr/>
+                        <a:t>System administrators</a:t>
+                      </a:r>
+                    </a:p>
+                  </a:txBody>
+                </a:tc>
+                <a:tc>
+                  <a:txBody>
+                    <a:bodyPr/>
+                    <a:lstStyle/>
+                    <a:p>
+                      <a:pPr lvl="0" indent="0" marL="0">
+                        <a:buNone/>
+                      </a:pPr>
+                      <a:r>
+                        <a:rPr/>
+                        <a:t>Technical access to the platform, but not necessarily permission to use the data analytically</a:t>
+                      </a:r>
+                    </a:p>
+                  </a:txBody>
+                </a:tc>
+              </a:tr>
             </a:tbl>
           </a:graphicData>
         </a:graphic>
       </p:graphicFrame>
-    </p:spTree>
-  </p:cSld>
-</p:sld>
-</file>
-
-<file path=ppt/slides/slide18.xml><?xml version="1.0" encoding="utf-8"?>
-<p:sld xmlns:a="http://schemas.openxmlformats.org/drawingml/2006/main" xmlns:r="http://schemas.openxmlformats.org/officeDocument/2006/relationships" xmlns:p="http://schemas.openxmlformats.org/presentationml/2006/main">
-  <p:cSld>
-    <p:spTree>
-      <p:nvGrpSpPr>
-        <p:cNvPr id="1" name=""/>
-        <p:cNvGrpSpPr/>
-        <p:nvPr/>
-      </p:nvGrpSpPr>
-      <p:grpSpPr>
-        <a:xfrm>
-          <a:off x="0" y="0"/>
-          <a:ext cx="0" cy="0"/>
-          <a:chOff x="0" y="0"/>
-          <a:chExt cx="0" cy="0"/>
-        </a:xfrm>
-      </p:grpSpPr>
-      <p:sp>
-        <p:nvSpPr>
-          <p:cNvPr id="3" name="Content Placeholder 2"/>
-          <p:cNvSpPr>
-            <a:spLocks noGrp="1"/>
-          </p:cNvSpPr>
-          <p:nvPr>
-            <p:ph idx="1"/>
-          </p:nvPr>
-        </p:nvSpPr>
-        <p:spPr/>
-        <p:txBody>
-          <a:bodyPr/>
-          <a:lstStyle/>
-          <a:p>
-            <a:pPr lvl="0" indent="0" marL="0">
-              <a:buNone/>
-            </a:pPr>
-            <a:r>
-              <a:rPr/>
-              <a:t>Researchers</a:t>
-            </a:r>
-          </a:p>
-          <a:p>
-            <a:pPr lvl="0" indent="0" marL="0">
-              <a:buNone/>
-            </a:pPr>
-            <a:r>
-              <a:rPr/>
-              <a:t>Detailed but anonymized observations under a data-sharing agreement</a:t>
-            </a:r>
-          </a:p>
-          <a:p>
-            <a:pPr lvl="0" indent="0" marL="0">
-              <a:buNone/>
-            </a:pPr>
-            <a:r>
-              <a:rPr/>
-              <a:t>Government agencies</a:t>
-            </a:r>
-          </a:p>
-          <a:p>
-            <a:pPr lvl="0" indent="0" marL="0">
-              <a:buNone/>
-            </a:pPr>
-            <a:r>
-              <a:rPr/>
-              <a:t>Full datasets needed for regulatory or policy purposes</a:t>
-            </a:r>
-          </a:p>
-          <a:p>
-            <a:pPr lvl="0" indent="0" marL="0">
-              <a:buNone/>
-            </a:pPr>
-            <a:r>
-              <a:rPr/>
-              <a:t>Data stewards</a:t>
-            </a:r>
-          </a:p>
-          <a:p>
-            <a:pPr lvl="0" indent="0" marL="0">
-              <a:buNone/>
-            </a:pPr>
-            <a:r>
-              <a:rPr/>
-              <a:t>Ability to edit, correct, and approve records</a:t>
-            </a:r>
-          </a:p>
-          <a:p>
-            <a:pPr lvl="0" indent="0" marL="0">
-              <a:buNone/>
-            </a:pPr>
-            <a:r>
-              <a:rPr/>
-              <a:t>System administrators</a:t>
-            </a:r>
-          </a:p>
-          <a:p>
-            <a:pPr lvl="0" indent="0" marL="0">
-              <a:buNone/>
-            </a:pPr>
-            <a:r>
-              <a:rPr/>
-              <a:t>Technical access to the platform, but not necessarily permission to use the data analytically</a:t>
-            </a:r>
-          </a:p>
-        </p:txBody>
-      </p:sp>
     </p:spTree>
   </p:cSld>
 </p:sld>
